--- a/entregables/presentaciones/IQS_B1_Introduccion.pptx
+++ b/entregables/presentaciones/IQS_B1_Introduccion.pptx
@@ -3002,7 +3002,7 @@
                 <a:ea typeface="Calibri" pitchFamily="34" charset="-122"/>
                 <a:cs typeface="Calibri" pitchFamily="34" charset="-120"/>
               </a:rPr>
-              <a:t>Diseño mecatrónico = optimización conjunta: minimizar el coste J o maximizar el MDQ (ecs. 1.2 y 1.4, pp. 6-7; De Silva, 2003):</a:t>
+              <a:t>Diseño mecatrónico = optimización conjunta: minimizar el coste J o maximizar el MDQ (ecs. 1.2 y 1.4; De Silva et al., 2016, pp. 6-7):</a:t>
             </a:r>
             <a:endParaRPr lang="en-US" sz="1400" dirty="0"/>
           </a:p>

--- a/entregables/presentaciones/IQS_B1_Introduccion.pptx
+++ b/entregables/presentaciones/IQS_B1_Introduccion.pptx
@@ -2068,7 +2068,7 @@
           <a:lstStyle/>
           <a:p>
             <a:r>
-              <a:t>Dibujar el bucle en la pizarra aunque esté proyectado; el gesto de cerrar el ciclo ayuda a fijarlo. Sobre la energía: v·i = ω·τ significa que la potencia eléctrica de entrada iguala la mecánica de salida en el transformador ideal. Aviso de ingeniería: los factores de seguridad excesivos y el diseño por peor caso no dan diseños óptimos. Conectar con el proyecto integrador: es el mismo bucle (modelo en B4, control en B5, percepción en B6 y B7).</a:t>
+              <a:t>Dibujar el bucle en la pizarra aunque esté proyectado; el gesto de cerrar el ciclo ayuda a fijarlo. Sobre la energía: v·i = ω·τ significa que la potencia eléctrica de entrada iguala la mecánica de salida en el convertidor electromecánico ideal. Aviso de ingeniería: los factores de seguridad excesivos y el diseño por peor caso no dan diseños óptimos. Conectar con el proyecto integrador: es el mismo bucle (modelo en B4, control en B5, percepción en B6 y B7).</a:t>
             </a:r>
           </a:p>
         </p:txBody>
@@ -10093,7 +10093,7 @@
                 <a:ea typeface="Calibri" pitchFamily="34" charset="-122"/>
                 <a:cs typeface="Calibri" pitchFamily="34" charset="-120"/>
               </a:rPr>
-              <a:t>El término lo acuñó Yasakawa Electric (Japón) en 1969; marca registrada en 1972, liberada en 1982.</a:t>
+              <a:t>El término lo acuñó Yaskawa Electric (Japón) en 1969; marca registrada en 1972, liberada en 1982.</a:t>
             </a:r>
             <a:endParaRPr lang="en-US" sz="1500" dirty="0"/>
           </a:p>
